--- a/00 - Intro.pptx
+++ b/00 - Intro.pptx
@@ -17100,11 +17100,19 @@
             </a:r>
             <a:r>
               <a:rPr lang="en-GB" b="1" dirty="0"/>
-              <a:t>GitHub</a:t>
+              <a:t>GitHub &amp; </a:t>
+            </a:r>
+            <a:r>
+              <a:rPr lang="en-GB" b="1"/>
+              <a:t>DockerHub</a:t>
+            </a:r>
+            <a:r>
+              <a:rPr lang="en-GB"/>
+              <a:t> </a:t>
             </a:r>
             <a:r>
               <a:rPr lang="en-GB" dirty="0"/>
-              <a:t> account</a:t>
+              <a:t>account</a:t>
             </a:r>
           </a:p>
           <a:p>
